--- a/curso/pptx/S49.pptx
+++ b/curso/pptx/S49.pptx
@@ -6792,7 +6792,7 @@
                 </a:solidFill>
                 <a:latin typeface="Nunito Sans"/>
               </a:rPr>
-              <a:t>Convencer:</a:t>
+              <a:t>说服：</a:t>
             </a:r>
             <a:r>
               <a:rPr sz="2800" b="0">
@@ -6801,7 +6801,7 @@
                 </a:solidFill>
                 <a:latin typeface="Nunito Sans"/>
               </a:rPr>
-              <a:t> dar razones que el otro puede examinar</a:t>
+              <a:t>给出对方可以检验的理由</a:t>
             </a:r>
           </a:p>
           <a:p>
@@ -6826,7 +6826,7 @@
                 </a:solidFill>
                 <a:latin typeface="Nunito Sans"/>
               </a:rPr>
-              <a:t>Manipular:</a:t>
+              <a:t>操纵：</a:t>
             </a:r>
             <a:r>
               <a:rPr sz="2800" b="0">
@@ -6835,7 +6835,7 @@
                 </a:solidFill>
                 <a:latin typeface="Nunito Sans"/>
               </a:rPr>
-              <a:t> esquivar su juicio o esconderle información</a:t>
+              <a:t>绕开他的判断，或对他隐瞒信息</a:t>
             </a:r>
           </a:p>
           <a:p>
@@ -6860,7 +6860,7 @@
                 </a:solidFill>
                 <a:latin typeface="Nunito Sans"/>
               </a:rPr>
-              <a:t>La pregunta: ¿te dejan pensar y ver los datos?</a:t>
+              <a:t>问题是：他们让你思考、让你看数据吗？</a:t>
             </a:r>
           </a:p>
           <a:p>
@@ -6885,7 +6885,7 @@
                 </a:solidFill>
                 <a:latin typeface="Nunito Sans"/>
               </a:rPr>
-              <a:t>Muchos mensajes mezclan las dos cosas: hay grises</a:t>
+              <a:t>很多信息把两者混在一起：有灰色地带</a:t>
             </a:r>
           </a:p>
         </p:txBody>
@@ -7119,7 +7119,7 @@
                 </a:solidFill>
                 <a:latin typeface="Nunito Sans"/>
               </a:rPr>
-              <a:t>Esconde información</a:t>
+              <a:t>隐瞒信息</a:t>
             </a:r>
           </a:p>
           <a:p>
@@ -7144,7 +7144,7 @@
                 </a:solidFill>
                 <a:latin typeface="Nunito Sans"/>
               </a:rPr>
-              <a:t>Mete prisa para que no pienses</a:t>
+              <a:t>催得很急，让你来不及思考</a:t>
             </a:r>
           </a:p>
           <a:p>
@@ -7169,7 +7169,7 @@
                 </a:solidFill>
                 <a:latin typeface="Nunito Sans"/>
               </a:rPr>
-              <a:t>Usa el miedo para que no pienses</a:t>
+              <a:t>用恐惧让你不去思考</a:t>
             </a:r>
           </a:p>
           <a:p>
@@ -7194,7 +7194,7 @@
                 </a:solidFill>
                 <a:latin typeface="Nunito Sans"/>
               </a:rPr>
-              <a:t>Quiere que no preguntes</a:t>
+              <a:t>不想让你提问</a:t>
             </a:r>
           </a:p>
         </p:txBody>
@@ -7324,7 +7324,7 @@
                 </a:solidFill>
                 <a:latin typeface="Nunito Sans"/>
               </a:rPr>
-              <a:t>Enseña los datos</a:t>
+              <a:t>展示数据</a:t>
             </a:r>
           </a:p>
           <a:p>
@@ -7349,7 +7349,7 @@
                 </a:solidFill>
                 <a:latin typeface="Nunito Sans"/>
               </a:rPr>
-              <a:t>Te deja tiempo para decidir</a:t>
+              <a:t>给你时间做决定</a:t>
             </a:r>
           </a:p>
           <a:p>
@@ -7374,7 +7374,7 @@
                 </a:solidFill>
                 <a:latin typeface="Nunito Sans"/>
               </a:rPr>
-              <a:t>Da razones que puedes comprobar</a:t>
+              <a:t>给出你可以核实的理由</a:t>
             </a:r>
           </a:p>
           <a:p>
@@ -7399,7 +7399,7 @@
                 </a:solidFill>
                 <a:latin typeface="Nunito Sans"/>
               </a:rPr>
-              <a:t>Acepta tus preguntas</a:t>
+              <a:t>接受你的提问</a:t>
             </a:r>
           </a:p>
         </p:txBody>

--- a/curso/pptx/S49.pptx
+++ b/curso/pptx/S49.pptx
@@ -4046,7 +4046,7 @@
                 </a:solidFill>
                 <a:latin typeface="Fredoka"/>
               </a:rPr>
-              <a:t>案例1 · Dylan的手机</a:t>
+              <a:t>案例1 · 一个男孩的手机</a:t>
             </a:r>
           </a:p>
         </p:txBody>
@@ -4128,7 +4128,7 @@
                 </a:solidFill>
                 <a:latin typeface="Nunito Sans"/>
               </a:rPr>
-              <a:t>Dylan想要一部新手机。他对爸爸说：“我这部用了5年，电池只能用2小时，修一下几乎和买新的一样贵。”</a:t>
+              <a:t>一个男孩想要一部新手机。他对爸爸说：“我这部用了5年，电池只能用2小时，修一下几乎和买新的一样贵。”</a:t>
             </a:r>
           </a:p>
         </p:txBody>
@@ -4176,7 +4176,7 @@
                 </a:solidFill>
                 <a:latin typeface="Nunito Sans"/>
               </a:rPr>
-              <a:t>Dylan想要什么？想让爸爸给他买一部手机。</a:t>
+              <a:t>这个男孩想要什么？想让爸爸给他买一部手机。</a:t>
             </a:r>
           </a:p>
           <a:p>
@@ -4251,7 +4251,7 @@
                 </a:solidFill>
                 <a:latin typeface="Nunito Sans"/>
               </a:rPr>
-              <a:t>结论：Dylan是在努力说服。他给出了理由，也让他爸爸思考。</a:t>
+              <a:t>结论：这个男孩是在努力说服。他给出了理由，也让他爸爸思考。</a:t>
             </a:r>
           </a:p>
         </p:txBody>
